--- a/figures/visualize_matrix_profile.pptx
+++ b/figures/visualize_matrix_profile.pptx
@@ -261,7 +261,7 @@
           <a:p>
             <a:fld id="{C97EB2AD-49ED-E547-BE5E-65F3E2F848A9}" type="datetimeFigureOut">
               <a:rPr lang="en-US" smtClean="0"/>
-              <a:t>1/8/26</a:t>
+              <a:t>2/22/26</a:t>
             </a:fld>
             <a:endParaRPr lang="en-US"/>
           </a:p>
@@ -461,7 +461,7 @@
           <a:p>
             <a:fld id="{C97EB2AD-49ED-E547-BE5E-65F3E2F848A9}" type="datetimeFigureOut">
               <a:rPr lang="en-US" smtClean="0"/>
-              <a:t>1/8/26</a:t>
+              <a:t>2/22/26</a:t>
             </a:fld>
             <a:endParaRPr lang="en-US"/>
           </a:p>
@@ -671,7 +671,7 @@
           <a:p>
             <a:fld id="{C97EB2AD-49ED-E547-BE5E-65F3E2F848A9}" type="datetimeFigureOut">
               <a:rPr lang="en-US" smtClean="0"/>
-              <a:t>1/8/26</a:t>
+              <a:t>2/22/26</a:t>
             </a:fld>
             <a:endParaRPr lang="en-US"/>
           </a:p>
@@ -871,7 +871,7 @@
           <a:p>
             <a:fld id="{C97EB2AD-49ED-E547-BE5E-65F3E2F848A9}" type="datetimeFigureOut">
               <a:rPr lang="en-US" smtClean="0"/>
-              <a:t>1/8/26</a:t>
+              <a:t>2/22/26</a:t>
             </a:fld>
             <a:endParaRPr lang="en-US"/>
           </a:p>
@@ -1147,7 +1147,7 @@
           <a:p>
             <a:fld id="{C97EB2AD-49ED-E547-BE5E-65F3E2F848A9}" type="datetimeFigureOut">
               <a:rPr lang="en-US" smtClean="0"/>
-              <a:t>1/8/26</a:t>
+              <a:t>2/22/26</a:t>
             </a:fld>
             <a:endParaRPr lang="en-US"/>
           </a:p>
@@ -1415,7 +1415,7 @@
           <a:p>
             <a:fld id="{C97EB2AD-49ED-E547-BE5E-65F3E2F848A9}" type="datetimeFigureOut">
               <a:rPr lang="en-US" smtClean="0"/>
-              <a:t>1/8/26</a:t>
+              <a:t>2/22/26</a:t>
             </a:fld>
             <a:endParaRPr lang="en-US"/>
           </a:p>
@@ -1830,7 +1830,7 @@
           <a:p>
             <a:fld id="{C97EB2AD-49ED-E547-BE5E-65F3E2F848A9}" type="datetimeFigureOut">
               <a:rPr lang="en-US" smtClean="0"/>
-              <a:t>1/8/26</a:t>
+              <a:t>2/22/26</a:t>
             </a:fld>
             <a:endParaRPr lang="en-US"/>
           </a:p>
@@ -1972,7 +1972,7 @@
           <a:p>
             <a:fld id="{C97EB2AD-49ED-E547-BE5E-65F3E2F848A9}" type="datetimeFigureOut">
               <a:rPr lang="en-US" smtClean="0"/>
-              <a:t>1/8/26</a:t>
+              <a:t>2/22/26</a:t>
             </a:fld>
             <a:endParaRPr lang="en-US"/>
           </a:p>
@@ -2085,7 +2085,7 @@
           <a:p>
             <a:fld id="{C97EB2AD-49ED-E547-BE5E-65F3E2F848A9}" type="datetimeFigureOut">
               <a:rPr lang="en-US" smtClean="0"/>
-              <a:t>1/8/26</a:t>
+              <a:t>2/22/26</a:t>
             </a:fld>
             <a:endParaRPr lang="en-US"/>
           </a:p>
@@ -2398,7 +2398,7 @@
           <a:p>
             <a:fld id="{C97EB2AD-49ED-E547-BE5E-65F3E2F848A9}" type="datetimeFigureOut">
               <a:rPr lang="en-US" smtClean="0"/>
-              <a:t>1/8/26</a:t>
+              <a:t>2/22/26</a:t>
             </a:fld>
             <a:endParaRPr lang="en-US"/>
           </a:p>
@@ -2687,7 +2687,7 @@
           <a:p>
             <a:fld id="{C97EB2AD-49ED-E547-BE5E-65F3E2F848A9}" type="datetimeFigureOut">
               <a:rPr lang="en-US" smtClean="0"/>
-              <a:t>1/8/26</a:t>
+              <a:t>2/22/26</a:t>
             </a:fld>
             <a:endParaRPr lang="en-US"/>
           </a:p>
@@ -2930,7 +2930,7 @@
           <a:p>
             <a:fld id="{C97EB2AD-49ED-E547-BE5E-65F3E2F848A9}" type="datetimeFigureOut">
               <a:rPr lang="en-US" smtClean="0"/>
-              <a:t>1/8/26</a:t>
+              <a:t>2/22/26</a:t>
             </a:fld>
             <a:endParaRPr lang="en-US"/>
           </a:p>
@@ -4081,8 +4081,8 @@
           </a:p>
         </p:txBody>
       </p:sp>
-      <mc:AlternateContent xmlns:mc="http://schemas.openxmlformats.org/markup-compatibility/2006" xmlns:a14="http://schemas.microsoft.com/office/drawing/2010/main">
-        <mc:Choice Requires="a14">
+      <mc:AlternateContent xmlns:mc="http://schemas.openxmlformats.org/markup-compatibility/2006">
+        <mc:Choice xmlns:a14="http://schemas.microsoft.com/office/drawing/2010/main" Requires="a14">
           <p:sp>
             <p:nvSpPr>
               <p:cNvPr id="25" name="TextBox 24">
@@ -4098,7 +4098,7 @@
             <p:spPr>
               <a:xfrm>
                 <a:off x="2873096" y="1376209"/>
-                <a:ext cx="185114" cy="276999"/>
+                <a:ext cx="132344" cy="276999"/>
               </a:xfrm>
               <a:prstGeom prst="rect">
                 <a:avLst/>
@@ -4122,7 +4122,7 @@
                         <a:rPr lang="en-US" b="0" i="1" smtClean="0">
                           <a:latin typeface="Cambria Math" panose="02040503050406030204" pitchFamily="18" charset="0"/>
                         </a:rPr>
-                        <m:t>h</m:t>
+                        <m:t>𝑙</m:t>
                       </m:r>
                     </m:oMath>
                   </m:oMathPara>
@@ -4132,7 +4132,7 @@
             </p:txBody>
           </p:sp>
         </mc:Choice>
-        <mc:Fallback xmlns="">
+        <mc:Fallback>
           <p:sp>
             <p:nvSpPr>
               <p:cNvPr id="25" name="TextBox 24">
@@ -4150,7 +4150,7 @@
             <p:spPr>
               <a:xfrm>
                 <a:off x="2873096" y="1376209"/>
-                <a:ext cx="185114" cy="276999"/>
+                <a:ext cx="132344" cy="276999"/>
               </a:xfrm>
               <a:prstGeom prst="rect">
                 <a:avLst/>
@@ -4158,7 +4158,7 @@
               <a:blipFill>
                 <a:blip r:embed="rId5"/>
                 <a:stretch>
-                  <a:fillRect l="-33333" r="-33333" b="-4348"/>
+                  <a:fillRect l="-45455" r="-36364" b="-4348"/>
                 </a:stretch>
               </a:blipFill>
             </p:spPr>
